--- a/pencit.pptx
+++ b/pencit.pptx
@@ -1813,7 +1813,7 @@
         <p:spPr>
           <a:xfrm>
             <a:off x="2618612" y="1962131"/>
-            <a:ext cx="4467987" cy="2388218"/>
+            <a:ext cx="4467987" cy="2766783"/>
           </a:xfrm>
           <a:prstGeom prst="rect">
             <a:avLst/>
@@ -1857,83 +1857,97 @@
               </a:spcBef>
             </a:pPr>
             <a:r>
-              <a:rPr sz="2000" spc="-15">
+              <a:rPr sz="2000" spc="-15" dirty="0" err="1">
                 <a:latin typeface="Carlito"/>
                 <a:cs typeface="Carlito"/>
               </a:rPr>
-              <a:t>Pengantar Mata </a:t>
-            </a:r>
-            <a:r>
-              <a:rPr sz="2000" spc="-10">
+              <a:t>Pengantar</a:t>
+            </a:r>
+            <a:r>
+              <a:rPr sz="2000" spc="-15" dirty="0">
                 <a:latin typeface="Carlito"/>
                 <a:cs typeface="Carlito"/>
               </a:rPr>
-              <a:t>Kuliah  Semester </a:t>
-            </a:r>
-            <a:r>
-              <a:rPr lang="en-US" sz="2000" spc="-5">
+              <a:t> Mata </a:t>
+            </a:r>
+            <a:r>
+              <a:rPr sz="2000" spc="-10" dirty="0" err="1">
                 <a:latin typeface="Carlito"/>
                 <a:cs typeface="Carlito"/>
               </a:rPr>
-              <a:t>Genap</a:t>
-            </a:r>
-            <a:r>
-              <a:rPr sz="2000" spc="-5">
+              <a:t>Kuliah</a:t>
+            </a:r>
+            <a:r>
+              <a:rPr sz="2000" spc="-10" dirty="0">
                 <a:latin typeface="Carlito"/>
                 <a:cs typeface="Carlito"/>
               </a:rPr>
-              <a:t> </a:t>
-            </a:r>
-            <a:r>
-              <a:rPr sz="2000">
+              <a:t>  Semester </a:t>
+            </a:r>
+            <a:r>
+              <a:rPr lang="en-US" sz="2000" spc="-5" dirty="0" err="1">
                 <a:latin typeface="Carlito"/>
                 <a:cs typeface="Carlito"/>
               </a:rPr>
-              <a:t>20</a:t>
-            </a:r>
-            <a:r>
-              <a:rPr lang="en-US" sz="2000">
+              <a:t>Genap</a:t>
+            </a:r>
+            <a:r>
+              <a:rPr sz="2000" spc="-5" dirty="0">
                 <a:latin typeface="Carlito"/>
                 <a:cs typeface="Carlito"/>
               </a:rPr>
-              <a:t>19</a:t>
-            </a:r>
-            <a:r>
-              <a:rPr sz="2000">
+              <a:t> </a:t>
+            </a:r>
+            <a:r>
+              <a:rPr sz="2000" dirty="0">
                 <a:latin typeface="Carlito"/>
                 <a:cs typeface="Carlito"/>
               </a:rPr>
-              <a:t>/20</a:t>
-            </a:r>
-            <a:r>
-              <a:rPr lang="en-US" sz="2000">
+              <a:t>20</a:t>
+            </a:r>
+            <a:r>
+              <a:rPr lang="en-US" sz="2000" dirty="0">
                 <a:latin typeface="Carlito"/>
                 <a:cs typeface="Carlito"/>
               </a:rPr>
-              <a:t>20</a:t>
-            </a:r>
-            <a:r>
-              <a:rPr sz="2000">
+              <a:t>19</a:t>
+            </a:r>
+            <a:r>
+              <a:rPr sz="2000" dirty="0">
                 <a:latin typeface="Carlito"/>
                 <a:cs typeface="Carlito"/>
               </a:rPr>
-              <a:t> </a:t>
-            </a:r>
-            <a:br>
-              <a:rPr lang="en-US" sz="2000">
+              <a:t>/20</a:t>
+            </a:r>
+            <a:r>
+              <a:rPr lang="en-US" sz="2000" dirty="0">
                 <a:latin typeface="Carlito"/>
                 <a:cs typeface="Carlito"/>
               </a:rPr>
-            </a:br>
-            <a:r>
-              <a:rPr sz="2000">
+              <a:t>20</a:t>
+            </a:r>
+            <a:r>
+              <a:rPr sz="2000" dirty="0">
                 <a:latin typeface="Carlito"/>
                 <a:cs typeface="Carlito"/>
               </a:rPr>
               <a:t> </a:t>
             </a:r>
-            <a:r>
-              <a:rPr lang="en-US" sz="2000" spc="-10">
+            <a:br>
+              <a:rPr lang="en-US" sz="2000" dirty="0">
+                <a:latin typeface="Carlito"/>
+                <a:cs typeface="Carlito"/>
+              </a:rPr>
+            </a:br>
+            <a:r>
+              <a:rPr sz="2000" dirty="0">
+                <a:latin typeface="Carlito"/>
+                <a:cs typeface="Carlito"/>
+              </a:rPr>
+              <a:t> </a:t>
+            </a:r>
+            <a:r>
+              <a:rPr lang="en-US" sz="2000" spc="-10" dirty="0" err="1">
                 <a:latin typeface="Carlito"/>
                 <a:cs typeface="Carlito"/>
               </a:rPr>
@@ -1945,12 +1959,39 @@
                 <a:cs typeface="Carlito"/>
               </a:rPr>
             </a:br>
-            <a:r>
+            <a:br>
               <a:rPr lang="en-US" sz="2000" spc="-10">
                 <a:latin typeface="Carlito"/>
                 <a:cs typeface="Carlito"/>
               </a:rPr>
-              <a:t>Politeknik Harapan Bersama</a:t>
+            </a:br>
+            <a:r>
+              <a:rPr lang="en-US" sz="2000" spc="-10">
+                <a:latin typeface="Carlito"/>
+                <a:cs typeface="Carlito"/>
+              </a:rPr>
+              <a:t>Politeknik</a:t>
+            </a:r>
+            <a:r>
+              <a:rPr lang="en-US" sz="2000" spc="-10" dirty="0">
+                <a:latin typeface="Carlito"/>
+                <a:cs typeface="Carlito"/>
+              </a:rPr>
+              <a:t> </a:t>
+            </a:r>
+            <a:r>
+              <a:rPr lang="en-US" sz="2000" spc="-10" dirty="0" err="1">
+                <a:latin typeface="Carlito"/>
+                <a:cs typeface="Carlito"/>
+              </a:rPr>
+              <a:t>Harapan</a:t>
+            </a:r>
+            <a:r>
+              <a:rPr lang="en-US" sz="2000" spc="-10" dirty="0">
+                <a:latin typeface="Carlito"/>
+                <a:cs typeface="Carlito"/>
+              </a:rPr>
+              <a:t> Bersama</a:t>
             </a:r>
             <a:endParaRPr sz="2000" dirty="0">
               <a:latin typeface="Carlito"/>
